--- a/docs/slides/zk_offline_dqn_thuyet_trinh.pptx
+++ b/docs/slides/zk_offline_dqn_thuyet_trinh.pptx
@@ -3618,7 +3618,7 @@
                 </a:solidFill>
                 <a:latin typeface="Segoe UI"/>
               </a:rPr>
-              <a:t>25 cấu hình</a:t>
+              <a:t>26 cấu hình</a:t>
             </a:r>
           </a:p>
         </p:txBody>
@@ -3657,7 +3657,7 @@
                 </a:solidFill>
                 <a:latin typeface="Segoe UI"/>
               </a:rPr>
-              <a:t>đã prove và verify, một lượt chạy một máy</a:t>
+              <a:t>đã prove và verify, tất cả dưới một prover</a:t>
             </a:r>
           </a:p>
         </p:txBody>
@@ -8813,7 +8813,7 @@
                 </a:solidFill>
                 <a:latin typeface="Consolas"/>
               </a:rPr>
-              <a:t>cycle_count          5.193.244</a:t>
+              <a:t>cycle_count          4.258.262</a:t>
             </a:r>
           </a:p>
           <a:p>
@@ -8832,7 +8832,7 @@
                 </a:solidFill>
                 <a:latin typeface="Consolas"/>
               </a:rPr>
-              <a:t>prove_time_seconds   3.810088194</a:t>
+              <a:t>prove_time_seconds   3.293015934</a:t>
             </a:r>
           </a:p>
           <a:p>
@@ -8851,7 +8851,7 @@
                 </a:solidFill>
                 <a:latin typeface="Consolas"/>
               </a:rPr>
-              <a:t>verify_time_seconds  0.129283375</a:t>
+              <a:t>verify_time_seconds  0.128721639</a:t>
             </a:r>
           </a:p>
           <a:p>
@@ -8870,7 +8870,7 @@
                 </a:solidFill>
                 <a:latin typeface="Consolas"/>
               </a:rPr>
-              <a:t>proof_size_bytes     2.841.071</a:t>
+              <a:t>proof_size_bytes     2.830.831</a:t>
             </a:r>
           </a:p>
           <a:p>
@@ -8946,7 +8946,7 @@
                 </a:solidFill>
                 <a:latin typeface="Consolas"/>
               </a:rPr>
-              <a:t>guest_elf_sha256     ff2c14b1…   ← chương trình nào</a:t>
+              <a:t>guest_elf_sha256     6f135f17…   ← chương trình nào</a:t>
             </a:r>
           </a:p>
           <a:p>
@@ -12646,7 +12646,7 @@
                 </a:solidFill>
                 <a:latin typeface="Segoe UI"/>
               </a:rPr>
-              <a:t>25 cấu hình proof-verified, sinh trong MỘT lượt chạy trên MỘT máy g5.2xlarge.</a:t>
+              <a:t>26 cấu hình proof-verified, tất cả dưới prover CUDA trên g5.2xlarge.</a:t>
             </a:r>
           </a:p>
         </p:txBody>
@@ -12917,7 +12917,7 @@
                           </a:solidFill>
                           <a:latin typeface="Consolas"/>
                         </a:rPr>
-                        <a:t>60,5</a:t>
+                        <a:t>1,0</a:t>
                       </a:r>
                     </a:p>
                   </a:txBody>
@@ -12940,7 +12940,7 @@
                           </a:solidFill>
                           <a:latin typeface="Consolas"/>
                         </a:rPr>
-                        <a:t>0,124</a:t>
+                        <a:t>0,126</a:t>
                       </a:r>
                     </a:p>
                   </a:txBody>
@@ -12985,7 +12985,7 @@
                           </a:solidFill>
                           <a:latin typeface="Segoe UI"/>
                         </a:rPr>
-                        <a:t>cpu</a:t>
+                        <a:t>cuda</a:t>
                       </a:r>
                     </a:p>
                   </a:txBody>
@@ -13055,7 +13055,7 @@
                           </a:solidFill>
                           <a:latin typeface="Consolas"/>
                         </a:rPr>
-                        <a:t>50,2</a:t>
+                        <a:t>0,9</a:t>
                       </a:r>
                     </a:p>
                   </a:txBody>
@@ -13078,7 +13078,7 @@
                           </a:solidFill>
                           <a:latin typeface="Consolas"/>
                         </a:rPr>
-                        <a:t>0,123</a:t>
+                        <a:t>0,125</a:t>
                       </a:r>
                     </a:p>
                   </a:txBody>
@@ -13123,7 +13123,7 @@
                           </a:solidFill>
                           <a:latin typeface="Segoe UI"/>
                         </a:rPr>
-                        <a:t>cpu</a:t>
+                        <a:t>cuda</a:t>
                       </a:r>
                     </a:p>
                   </a:txBody>
@@ -13170,7 +13170,7 @@
                           </a:solidFill>
                           <a:latin typeface="Consolas"/>
                         </a:rPr>
-                        <a:t>1.628.694</a:t>
+                        <a:t>1.628.852</a:t>
                       </a:r>
                     </a:p>
                   </a:txBody>
@@ -13193,7 +13193,7 @@
                           </a:solidFill>
                           <a:latin typeface="Consolas"/>
                         </a:rPr>
-                        <a:t>89,9</a:t>
+                        <a:t>1,8</a:t>
                       </a:r>
                     </a:p>
                   </a:txBody>
@@ -13216,7 +13216,7 @@
                           </a:solidFill>
                           <a:latin typeface="Consolas"/>
                         </a:rPr>
-                        <a:t>0,126</a:t>
+                        <a:t>0,129</a:t>
                       </a:r>
                     </a:p>
                   </a:txBody>
@@ -13261,7 +13261,7 @@
                           </a:solidFill>
                           <a:latin typeface="Segoe UI"/>
                         </a:rPr>
-                        <a:t>cpu</a:t>
+                        <a:t>cuda</a:t>
                       </a:r>
                     </a:p>
                   </a:txBody>
@@ -13308,7 +13308,7 @@
                           </a:solidFill>
                           <a:latin typeface="Consolas"/>
                         </a:rPr>
-                        <a:t>928.712</a:t>
+                        <a:t>928.948</a:t>
                       </a:r>
                     </a:p>
                   </a:txBody>
@@ -13331,7 +13331,7 @@
                           </a:solidFill>
                           <a:latin typeface="Consolas"/>
                         </a:rPr>
-                        <a:t>72,0</a:t>
+                        <a:t>1,3</a:t>
                       </a:r>
                     </a:p>
                   </a:txBody>
@@ -13354,7 +13354,7 @@
                           </a:solidFill>
                           <a:latin typeface="Consolas"/>
                         </a:rPr>
-                        <a:t>0,125</a:t>
+                        <a:t>0,127</a:t>
                       </a:r>
                     </a:p>
                   </a:txBody>
@@ -13399,7 +13399,7 @@
                           </a:solidFill>
                           <a:latin typeface="Segoe UI"/>
                         </a:rPr>
-                        <a:t>cpu</a:t>
+                        <a:t>cuda</a:t>
                       </a:r>
                     </a:p>
                   </a:txBody>
@@ -13446,7 +13446,7 @@
                           </a:solidFill>
                           <a:latin typeface="Consolas"/>
                         </a:rPr>
-                        <a:t>494.060</a:t>
+                        <a:t>494.177</a:t>
                       </a:r>
                     </a:p>
                   </a:txBody>
@@ -13469,7 +13469,7 @@
                           </a:solidFill>
                           <a:latin typeface="Consolas"/>
                         </a:rPr>
-                        <a:t>61,5</a:t>
+                        <a:t>1,0</a:t>
                       </a:r>
                     </a:p>
                   </a:txBody>
@@ -13492,7 +13492,7 @@
                           </a:solidFill>
                           <a:latin typeface="Consolas"/>
                         </a:rPr>
-                        <a:t>0,125</a:t>
+                        <a:t>0,126</a:t>
                       </a:r>
                     </a:p>
                   </a:txBody>
@@ -13537,7 +13537,7 @@
                           </a:solidFill>
                           <a:latin typeface="Segoe UI"/>
                         </a:rPr>
-                        <a:t>cpu</a:t>
+                        <a:t>cuda</a:t>
                       </a:r>
                     </a:p>
                   </a:txBody>
@@ -13584,7 +13584,7 @@
                           </a:solidFill>
                           <a:latin typeface="Consolas"/>
                         </a:rPr>
-                        <a:t>979.945</a:t>
+                        <a:t>935.015</a:t>
                       </a:r>
                     </a:p>
                   </a:txBody>
@@ -13653,7 +13653,7 @@
                           </a:solidFill>
                           <a:latin typeface="Consolas"/>
                         </a:rPr>
-                        <a:t>2.792.511</a:t>
+                        <a:t>2.791.999</a:t>
                       </a:r>
                     </a:p>
                   </a:txBody>
@@ -13722,7 +13722,7 @@
                           </a:solidFill>
                           <a:latin typeface="Consolas"/>
                         </a:rPr>
-                        <a:t>5.193.244</a:t>
+                        <a:t>4.258.262</a:t>
                       </a:r>
                     </a:p>
                   </a:txBody>
@@ -13745,7 +13745,7 @@
                           </a:solidFill>
                           <a:latin typeface="Consolas"/>
                         </a:rPr>
-                        <a:t>3,8</a:t>
+                        <a:t>3,3</a:t>
                       </a:r>
                     </a:p>
                   </a:txBody>
@@ -13791,7 +13791,7 @@
                           </a:solidFill>
                           <a:latin typeface="Consolas"/>
                         </a:rPr>
-                        <a:t>2.841.071</a:t>
+                        <a:t>2.830.831</a:t>
                       </a:r>
                     </a:p>
                   </a:txBody>
@@ -13860,7 +13860,7 @@
                           </a:solidFill>
                           <a:latin typeface="Consolas"/>
                         </a:rPr>
-                        <a:t>4.646.677</a:t>
+                        <a:t>4.042.983</a:t>
                       </a:r>
                     </a:p>
                   </a:txBody>
@@ -13883,7 +13883,7 @@
                           </a:solidFill>
                           <a:latin typeface="Consolas"/>
                         </a:rPr>
-                        <a:t>3,7</a:t>
+                        <a:t>3,1</a:t>
                       </a:r>
                     </a:p>
                   </a:txBody>
@@ -13929,7 +13929,7 @@
                           </a:solidFill>
                           <a:latin typeface="Consolas"/>
                         </a:rPr>
-                        <a:t>2.835.671</a:t>
+                        <a:t>2.829.015</a:t>
                       </a:r>
                     </a:p>
                   </a:txBody>
@@ -14021,7 +14021,7 @@
                           </a:solidFill>
                           <a:latin typeface="Consolas"/>
                         </a:rPr>
-                        <a:t>61,1</a:t>
+                        <a:t>1,0</a:t>
                       </a:r>
                     </a:p>
                   </a:txBody>
@@ -14044,7 +14044,7 @@
                           </a:solidFill>
                           <a:latin typeface="Consolas"/>
                         </a:rPr>
-                        <a:t>0,123</a:t>
+                        <a:t>0,126</a:t>
                       </a:r>
                     </a:p>
                   </a:txBody>
@@ -14089,7 +14089,7 @@
                           </a:solidFill>
                           <a:latin typeface="Segoe UI"/>
                         </a:rPr>
-                        <a:t>cpu</a:t>
+                        <a:t>cuda</a:t>
                       </a:r>
                     </a:p>
                   </a:txBody>
@@ -14136,7 +14136,7 @@
                           </a:solidFill>
                           <a:latin typeface="Consolas"/>
                         </a:rPr>
-                        <a:t>2.758.670</a:t>
+                        <a:t>2.758.625</a:t>
                       </a:r>
                     </a:p>
                   </a:txBody>
@@ -14159,7 +14159,7 @@
                           </a:solidFill>
                           <a:latin typeface="Consolas"/>
                         </a:rPr>
-                        <a:t>2,5</a:t>
+                        <a:t>2,6</a:t>
                       </a:r>
                     </a:p>
                   </a:txBody>
@@ -14274,7 +14274,7 @@
                           </a:solidFill>
                           <a:latin typeface="Consolas"/>
                         </a:rPr>
-                        <a:t>1.683.525.837</a:t>
+                        <a:t>1.683.536.040</a:t>
                       </a:r>
                     </a:p>
                   </a:txBody>
@@ -14297,7 +14297,7 @@
                           </a:solidFill>
                           <a:latin typeface="Consolas"/>
                         </a:rPr>
-                        <a:t>755,2</a:t>
+                        <a:t>770,6</a:t>
                       </a:r>
                     </a:p>
                   </a:txBody>
@@ -14412,7 +14412,7 @@
                           </a:solidFill>
                           <a:latin typeface="Consolas"/>
                         </a:rPr>
-                        <a:t>422.415.621</a:t>
+                        <a:t>422.411.631</a:t>
                       </a:r>
                     </a:p>
                   </a:txBody>
@@ -14435,7 +14435,7 @@
                           </a:solidFill>
                           <a:latin typeface="Consolas"/>
                         </a:rPr>
-                        <a:t>199,7</a:t>
+                        <a:t>191,8</a:t>
                       </a:r>
                     </a:p>
                   </a:txBody>
@@ -14550,7 +14550,7 @@
                           </a:solidFill>
                           <a:latin typeface="Consolas"/>
                         </a:rPr>
-                        <a:t>6.180.861.737</a:t>
+                        <a:t>6.189.380.355</a:t>
                       </a:r>
                     </a:p>
                   </a:txBody>
@@ -14573,7 +14573,7 @@
                           </a:solidFill>
                           <a:latin typeface="Consolas"/>
                         </a:rPr>
-                        <a:t>1.596,9</a:t>
+                        <a:t>1.590,2</a:t>
                       </a:r>
                     </a:p>
                   </a:txBody>
@@ -14596,7 +14596,7 @@
                           </a:solidFill>
                           <a:latin typeface="Consolas"/>
                         </a:rPr>
-                        <a:t>68,024</a:t>
+                        <a:t>67,979</a:t>
                       </a:r>
                     </a:p>
                   </a:txBody>
@@ -14619,7 +14619,7 @@
                           </a:solidFill>
                           <a:latin typeface="Consolas"/>
                         </a:rPr>
-                        <a:t>1.468.175.345</a:t>
+                        <a:t>1.469.721.875</a:t>
                       </a:r>
                     </a:p>
                   </a:txBody>
@@ -14729,7 +14729,7 @@
                 </a:solidFill>
                 <a:latin typeface="Segoe UI"/>
               </a:rPr>
-              <a:t>52.941×</a:t>
+              <a:t>53.014×</a:t>
             </a:r>
           </a:p>
         </p:txBody>
@@ -14768,7 +14768,7 @@
                 </a:solidFill>
                 <a:latin typeface="Segoe UI"/>
               </a:rPr>
-              <a:t>dải cycles, 116.750 → 6,18 tỉ — mà verify gần như không đổi</a:t>
+              <a:t>dải cycles, 116.750 → 6,19 tỉ — mà verify gần như không đổi</a:t>
             </a:r>
           </a:p>
         </p:txBody>
@@ -14846,7 +14846,7 @@
                 </a:solidFill>
                 <a:latin typeface="Segoe UI"/>
               </a:rPr>
-              <a:t>15 / 10</a:t>
+              <a:t>26 / 26</a:t>
             </a:r>
           </a:p>
         </p:txBody>
@@ -14885,7 +14885,7 @@
                 </a:solidFill>
                 <a:latin typeface="Segoe UI"/>
               </a:rPr>
-              <a:t>dòng chạy CUDA / CPU</a:t>
+              <a:t>dòng chạy CUDA — trước đây 10 dòng buộc phải chạy CPU</a:t>
             </a:r>
           </a:p>
         </p:txBody>
@@ -14924,7 +14924,7 @@
                 </a:solidFill>
                 <a:latin typeface="Segoe UI"/>
               </a:rPr>
-              <a:t>VÌ SAO TRỘN CPU VÀ GPU</a:t>
+              <a:t>MỘT PROVER CHO CẢ BẢNG</a:t>
             </a:r>
           </a:p>
           <a:p>
@@ -14940,7 +14940,7 @@
                 </a:solidFill>
                 <a:latin typeface="Segoe UI"/>
               </a:rPr>
-              <a:t>Chỉ </a:t>
+              <a:t>Trước đây chỉ </a:t>
             </a:r>
             <a:r>
               <a:rPr sz="1250" b="1" i="0">
@@ -14958,7 +14958,7 @@
                 </a:solidFill>
                 <a:latin typeface="Segoe UI"/>
               </a:rPr>
-              <a:t> có nhánh CUDA trong mã nguồn — fragment và aggregation. Sáu host kia không chạy GPU được, chấm hết. Đó là sự thật kỹ thuật, không phải lựa chọn thí nghiệm.</a:t>
+              <a:t> có nhánh CUDA, nên mười dòng buộc phải chạy CPU và cột Prove trộn hai loại phần cứng. Nay cả tám host đọc `SP1_CUDA`, nên cột đó so được với nhau.</a:t>
             </a:r>
           </a:p>
         </p:txBody>
@@ -14997,7 +14997,7 @@
                 </a:solidFill>
                 <a:latin typeface="Segoe UI"/>
               </a:rPr>
-              <a:t>CỘT PROVER TỒN TẠI ĐỂ CHẶN ĐỌC SAI</a:t>
+              <a:t>CHUYỂN SANG GPU KHÔNG LÀM QUAN HỆ RẺ ĐI</a:t>
             </a:r>
           </a:p>
           <a:p>
@@ -15013,7 +15013,7 @@
                 </a:solidFill>
                 <a:latin typeface="Segoe UI"/>
               </a:rPr>
-              <a:t>Merkle 50,2 s trông chậm hơn Fragment k=8 3,8 s — dù Fragment nặng gấp </a:t>
+              <a:t>Mười dòng đó nhanh lên </a:t>
             </a:r>
             <a:r>
               <a:rPr sz="1250" b="1" i="0">
@@ -15022,7 +15022,7 @@
                 </a:solidFill>
                 <a:latin typeface="Segoe UI"/>
               </a:rPr>
-              <a:t>44 lần</a:t>
+              <a:t>51–62×</a:t>
             </a:r>
             <a:r>
               <a:rPr sz="1250" b="0" i="0">
@@ -15031,7 +15031,25 @@
                 </a:solidFill>
                 <a:latin typeface="Segoe UI"/>
               </a:rPr>
-              <a:t> về cycles.</a:t>
+              <a:t> mà </a:t>
+            </a:r>
+            <a:r>
+              <a:rPr sz="1250" b="1" i="0">
+                <a:solidFill>
+                  <a:srgbClr val="141821"/>
+                </a:solidFill>
+                <a:latin typeface="Segoe UI"/>
+              </a:rPr>
+              <a:t>cycles không đổi một chữ số</a:t>
+            </a:r>
+            <a:r>
+              <a:rPr sz="1250" b="0" i="0">
+                <a:solidFill>
+                  <a:srgbClr val="39424F"/>
+                </a:solidFill>
+                <a:latin typeface="Segoe UI"/>
+              </a:rPr>
+              <a:t>. Đó là lý do bảng phải đọc bằng cycles, không bằng giây.</a:t>
             </a:r>
           </a:p>
         </p:txBody>
@@ -15964,7 +15982,7 @@
                           </a:solidFill>
                           <a:latin typeface="Consolas"/>
                         </a:rPr>
-                        <a:t>422.726.492</a:t>
+                        <a:t>422.706.047</a:t>
                       </a:r>
                     </a:p>
                   </a:txBody>
@@ -16057,7 +16075,7 @@
                           </a:solidFill>
                           <a:latin typeface="Consolas"/>
                         </a:rPr>
-                        <a:t>842.015.859</a:t>
+                        <a:t>842.030.244</a:t>
                       </a:r>
                     </a:p>
                   </a:txBody>
@@ -16150,7 +16168,7 @@
                           </a:solidFill>
                           <a:latin typeface="Consolas"/>
                         </a:rPr>
-                        <a:t>1.683.525.837</a:t>
+                        <a:t>1.683.536.040</a:t>
                       </a:r>
                     </a:p>
                   </a:txBody>
@@ -17005,7 +17023,7 @@
                 </a:solidFill>
                 <a:latin typeface="Segoe UI"/>
               </a:rPr>
-              <a:t>Rẻ: T=128 chỉ 2.758.670 cycles, prove 2,5 s</a:t>
+              <a:t>Rẻ: T=128 chỉ 2.758.625 cycles, prove 2,6 s</a:t>
             </a:r>
           </a:p>
         </p:txBody>
@@ -17814,7 +17832,7 @@
                           </a:solidFill>
                           <a:latin typeface="Consolas"/>
                         </a:rPr>
-                        <a:t>880.030</a:t>
+                        <a:t>879.949</a:t>
                       </a:r>
                     </a:p>
                   </a:txBody>
@@ -17884,7 +17902,7 @@
                           </a:solidFill>
                           <a:latin typeface="Consolas"/>
                         </a:rPr>
-                        <a:t>842.015.859</a:t>
+                        <a:t>842.030.244</a:t>
                       </a:r>
                     </a:p>
                   </a:txBody>
@@ -17907,7 +17925,7 @@
                           </a:solidFill>
                           <a:latin typeface="Consolas"/>
                         </a:rPr>
-                        <a:t>385,9 s</a:t>
+                        <a:t>392,1 s</a:t>
                       </a:r>
                     </a:p>
                   </a:txBody>
@@ -18522,7 +18540,7 @@
                           </a:solidFill>
                           <a:latin typeface="Consolas"/>
                         </a:rPr>
-                        <a:t>422.415.621</a:t>
+                        <a:t>422.411.631</a:t>
                       </a:r>
                     </a:p>
                   </a:txBody>
@@ -18545,7 +18563,7 @@
                           </a:solidFill>
                           <a:latin typeface="Consolas"/>
                         </a:rPr>
-                        <a:t>199,7 s</a:t>
+                        <a:t>191,8 s</a:t>
                       </a:r>
                     </a:p>
                   </a:txBody>
@@ -18661,7 +18679,7 @@
                           </a:solidFill>
                           <a:latin typeface="Consolas"/>
                         </a:rPr>
-                        <a:t>422.396.109</a:t>
+                        <a:t>422.387.142</a:t>
                       </a:r>
                     </a:p>
                   </a:txBody>
@@ -18684,7 +18702,7 @@
                           </a:solidFill>
                           <a:latin typeface="Consolas"/>
                         </a:rPr>
-                        <a:t>198,1 s</a:t>
+                        <a:t>192,7 s</a:t>
                       </a:r>
                     </a:p>
                   </a:txBody>
@@ -18800,7 +18818,7 @@
                           </a:solidFill>
                           <a:latin typeface="Consolas"/>
                         </a:rPr>
-                        <a:t>422.386.830</a:t>
+                        <a:t>422.401.017</a:t>
                       </a:r>
                     </a:p>
                   </a:txBody>
@@ -18823,7 +18841,7 @@
                           </a:solidFill>
                           <a:latin typeface="Consolas"/>
                         </a:rPr>
-                        <a:t>188,8 s</a:t>
+                        <a:t>193,1 s</a:t>
                       </a:r>
                     </a:p>
                   </a:txBody>
@@ -26465,7 +26483,7 @@
                           </a:solidFill>
                           <a:latin typeface="Consolas"/>
                         </a:rPr>
-                        <a:t>755,2 s</a:t>
+                        <a:t>770,6 s</a:t>
                       </a:r>
                     </a:p>
                   </a:txBody>
